--- a/docs/steps/step-13/final-demo.pptx
+++ b/docs/steps/step-13/final-demo.pptx
@@ -1004,7 +1004,7 @@
           <a:lstStyle/>
           <a:p>
             <a:r>
-              <a:t>Say the numbers out loud BEFORE starting the generators. Then the dashboard either matches or it does not.</a:t>
+              <a:t>Say the numbers out loud BEFORE starting the generators. Then the dashboard either matches or it does not. If asked why the window is 10s and not a minute: only for the demo, so the sinks say something without a minute of waiting. The job defaults to the specified minute and the verification runs against both.</a:t>
             </a:r>
           </a:p>
         </p:txBody>
@@ -7305,7 +7305,7 @@
                 </a:solidFill>
                 <a:latin typeface="Segoe UI"/>
               </a:rPr>
-              <a:t>and publish market value the same two ways, emitted once per minute.</a:t>
+              <a:t>and publish market value the same two ways, once per key per window.</a:t>
             </a:r>
           </a:p>
         </p:txBody>
@@ -8007,7 +8007,7 @@
                 </a:solidFill>
                 <a:latin typeface="Segoe UI"/>
               </a:rPr>
-              <a:t>price × position, 1-min window</a:t>
+              <a:t>price × position, 10s window</a:t>
             </a:r>
           </a:p>
         </p:txBody>
@@ -8127,7 +8127,7 @@
                 </a:solidFill>
                 <a:latin typeface="Segoe UI"/>
               </a:rPr>
-              <a:t>4 keys · 4/min</a:t>
+              <a:t>4 keys · 4 per window</a:t>
             </a:r>
           </a:p>
         </p:txBody>
@@ -8203,7 +8203,7 @@
                 </a:solidFill>
                 <a:latin typeface="Segoe UI"/>
               </a:rPr>
-              <a:t>16 keys · 16/min</a:t>
+              <a:t>16 keys · 16 per window</a:t>
             </a:r>
           </a:p>
         </p:txBody>
@@ -8483,7 +8483,7 @@
         </p:nvGraphicFramePr>
         <p:xfrm>
           <a:off x="685800" y="1746504"/>
-          <a:ext cx="4663440" cy="2231136"/>
+          <a:ext cx="4937760" cy="2962656"/>
         </p:xfrm>
         <a:graphic>
           <a:graphicData uri="http://schemas.openxmlformats.org/drawingml/2006/table">
@@ -8493,7 +8493,7 @@
               </a:tblPr>
               <a:tblGrid>
                 <a:gridCol w="2834640"/>
-                <a:gridCol w="1828800"/>
+                <a:gridCol w="2103120"/>
               </a:tblGrid>
               <a:tr h="402336">
                 <a:tc>
@@ -8509,7 +8509,7 @@
                           </a:solidFill>
                           <a:latin typeface="Segoe UI"/>
                         </a:rPr>
-                        <a:t>Input</a:t>
+                        <a:t>Input / setting</a:t>
                       </a:r>
                     </a:p>
                   </a:txBody>
@@ -8532,7 +8532,7 @@
                           </a:solidFill>
                           <a:latin typeface="Segoe UI"/>
                         </a:rPr>
-                        <a:t>Rate</a:t>
+                        <a:t>Demo value</a:t>
                       </a:r>
                     </a:p>
                   </a:txBody>
@@ -8779,6 +8779,102 @@
                   <a:tcPr marL="109728" marR="109728" anchor="ctr">
                     <a:solidFill>
                       <a:srgbClr val="FFFFFF"/>
+                    </a:solidFill>
+                  </a:tcPr>
+                </a:tc>
+              </a:tr>
+              <a:tr h="365760">
+                <a:tc>
+                  <a:txBody>
+                    <a:bodyPr wrap="square"/>
+                    <a:lstStyle/>
+                    <a:p>
+                      <a:pPr algn="l"/>
+                      <a:r>
+                        <a:rPr sz="1350" b="1" i="0">
+                          <a:solidFill>
+                            <a:srgbClr val="14222E"/>
+                          </a:solidFill>
+                          <a:latin typeface="Segoe UI"/>
+                        </a:rPr>
+                        <a:t>Window</a:t>
+                      </a:r>
+                    </a:p>
+                  </a:txBody>
+                  <a:tcPr marL="109728" marR="109728" anchor="ctr">
+                    <a:solidFill>
+                      <a:srgbClr val="F2F5F7"/>
+                    </a:solidFill>
+                  </a:tcPr>
+                </a:tc>
+                <a:tc>
+                  <a:txBody>
+                    <a:bodyPr wrap="square"/>
+                    <a:lstStyle/>
+                    <a:p>
+                      <a:pPr algn="r"/>
+                      <a:r>
+                        <a:rPr sz="1350" b="1" i="0">
+                          <a:solidFill>
+                            <a:srgbClr val="14222E"/>
+                          </a:solidFill>
+                          <a:latin typeface="Consolas"/>
+                        </a:rPr>
+                        <a:t>10 s  (spec: 1 min)</a:t>
+                      </a:r>
+                    </a:p>
+                  </a:txBody>
+                  <a:tcPr marL="109728" marR="109728" anchor="ctr">
+                    <a:solidFill>
+                      <a:srgbClr val="F2F5F7"/>
+                    </a:solidFill>
+                  </a:tcPr>
+                </a:tc>
+              </a:tr>
+              <a:tr h="365760">
+                <a:tc>
+                  <a:txBody>
+                    <a:bodyPr wrap="square"/>
+                    <a:lstStyle/>
+                    <a:p>
+                      <a:pPr algn="l"/>
+                      <a:r>
+                        <a:rPr sz="1350" b="1" i="0">
+                          <a:solidFill>
+                            <a:srgbClr val="14222E"/>
+                          </a:solidFill>
+                          <a:latin typeface="Segoe UI"/>
+                        </a:rPr>
+                        <a:t>Checkpoint interval</a:t>
+                      </a:r>
+                    </a:p>
+                  </a:txBody>
+                  <a:tcPr marL="109728" marR="109728" anchor="ctr">
+                    <a:solidFill>
+                      <a:srgbClr val="F2F5F7"/>
+                    </a:solidFill>
+                  </a:tcPr>
+                </a:tc>
+                <a:tc>
+                  <a:txBody>
+                    <a:bodyPr wrap="square"/>
+                    <a:lstStyle/>
+                    <a:p>
+                      <a:pPr algn="r"/>
+                      <a:r>
+                        <a:rPr sz="1350" b="1" i="0">
+                          <a:solidFill>
+                            <a:srgbClr val="14222E"/>
+                          </a:solidFill>
+                          <a:latin typeface="Consolas"/>
+                        </a:rPr>
+                        <a:t>1 s</a:t>
+                      </a:r>
+                    </a:p>
+                  </a:txBody>
+                  <a:tcPr marL="109728" marR="109728" anchor="ctr">
+                    <a:solidFill>
+                      <a:srgbClr val="F2F5F7"/>
                     </a:solidFill>
                   </a:tcPr>
                 </a:tc>
@@ -8797,7 +8893,7 @@
         </p:nvGraphicFramePr>
         <p:xfrm>
           <a:off x="5806440" y="1746504"/>
-          <a:ext cx="5394960" cy="1865376"/>
+          <a:ext cx="5760720" cy="1865376"/>
         </p:xfrm>
         <a:graphic>
           <a:graphicData uri="http://schemas.openxmlformats.org/drawingml/2006/table">
@@ -8808,7 +8904,7 @@
               <a:tblGrid>
                 <a:gridCol w="411480"/>
                 <a:gridCol w="2788920"/>
-                <a:gridCol w="1371600"/>
+                <a:gridCol w="1737360"/>
                 <a:gridCol w="822960"/>
               </a:tblGrid>
               <a:tr h="402336">
@@ -8871,7 +8967,7 @@
                           </a:solidFill>
                           <a:latin typeface="Segoe UI"/>
                         </a:rPr>
-                        <a:t>Rate</a:t>
+                        <a:t>Rate in the demo</a:t>
                       </a:r>
                     </a:p>
                   </a:txBody>
@@ -9153,7 +9249,7 @@
                           </a:solidFill>
                           <a:latin typeface="Consolas"/>
                         </a:rPr>
-                        <a:t>4 / min</a:t>
+                        <a:t>4 per 10 s</a:t>
                       </a:r>
                     </a:p>
                   </a:txBody>
@@ -9247,7 +9343,7 @@
                           </a:solidFill>
                           <a:latin typeface="Consolas"/>
                         </a:rPr>
-                        <a:t>16 / min</a:t>
+                        <a:t>16 per 10 s</a:t>
                       </a:r>
                     </a:p>
                   </a:txBody>
@@ -9293,7 +9389,7 @@
         </p:nvSpPr>
         <p:spPr>
           <a:xfrm>
-            <a:off x="685800" y="5074920"/>
+            <a:off x="685800" y="5394960"/>
             <a:ext cx="10881360" cy="822960"/>
           </a:xfrm>
           <a:prstGeom prst="rect">
@@ -9315,7 +9411,7 @@
                 </a:solidFill>
                 <a:latin typeface="Segoe UI"/>
               </a:rPr>
-              <a:t>Committing to the numbers before the run is what makes the demo a verification rather than a tour. scripts/verify-topics.sh checks every one of them against the real topics, and runs on every push.</a:t>
+              <a:t>The window is 10 s for the demo so the market value sinks say something without a minute of waiting — the job defaults to the specified minute, and the calculation is identical either way. Committing to these numbers before the run is what makes the demo a verification rather than a tour; scripts/verify-topics.sh checks every one of them against the real topics, on every push.</a:t>
             </a:r>
           </a:p>
         </p:txBody>
@@ -10340,7 +10436,7 @@
         </p:nvGraphicFramePr>
         <p:xfrm>
           <a:off x="6766560" y="1746504"/>
-          <a:ext cx="4754880" cy="1133856"/>
+          <a:ext cx="5120640" cy="1133856"/>
         </p:xfrm>
         <a:graphic>
           <a:graphicData uri="http://schemas.openxmlformats.org/drawingml/2006/table">
@@ -10349,7 +10445,7 @@
                 <a:tableStyleId>{5C22544A-7EE6-4342-B048-85BDC9FD1C3A}</a:tableStyleId>
               </a:tblPr>
               <a:tblGrid>
-                <a:gridCol w="2286000"/>
+                <a:gridCol w="2651760"/>
                 <a:gridCol w="1234440"/>
                 <a:gridCol w="1234440"/>
               </a:tblGrid>
@@ -10509,7 +10605,7 @@
                           </a:solidFill>
                           <a:latin typeface="Segoe UI"/>
                         </a:rPr>
-                        <a:t>1 s</a:t>
+                        <a:t>1 s  (the default)</a:t>
                       </a:r>
                     </a:p>
                   </a:txBody>

--- a/docs/steps/step-13/final-demo.pptx
+++ b/docs/steps/step-13/final-demo.pptx
@@ -934,7 +934,7 @@
           <a:lstStyle/>
           <a:p>
             <a:r>
-              <a:t>Numbered left to right, in the order the demo talks through them. Point at 1 and 2 as the inputs, 3-6 as the outputs to verify.</a:t>
+              <a:t>Numbered left to right, in the order the demo talks through them. Point at 1 and 2 as the inputs, 3-6 as the outputs to verify. If anyone reads '1 min' off the diagram, that is the specification -- the demo runs a 10s window.</a:t>
             </a:r>
           </a:p>
         </p:txBody>
@@ -7442,879 +7442,39 @@
           </a:p>
         </p:txBody>
       </p:sp>
-      <p:sp>
-        <p:nvSpPr>
-          <p:cNvPr id="5" name="Rounded Rectangle 4"/>
-          <p:cNvSpPr/>
+      <p:pic>
+        <p:nvPicPr>
+          <p:cNvPr id="5" name="Picture 4" descr="pipeline.png"/>
+          <p:cNvPicPr>
+            <a:picLocks noChangeAspect="1"/>
+          </p:cNvPicPr>
           <p:nvPr/>
-        </p:nvSpPr>
+        </p:nvPicPr>
+        <p:blipFill>
+          <a:blip r:embed="rId2"/>
+          <a:stretch>
+            <a:fillRect/>
+          </a:stretch>
+        </p:blipFill>
         <p:spPr>
           <a:xfrm>
-            <a:off x="685800" y="2112264"/>
-            <a:ext cx="2148840" cy="786384"/>
-          </a:xfrm>
-          <a:prstGeom prst="roundRect">
-            <a:avLst/>
-          </a:prstGeom>
-          <a:solidFill>
-            <a:srgbClr val="233645"/>
-          </a:solidFill>
-          <a:ln w="15875">
-            <a:solidFill>
-              <a:srgbClr val="233645"/>
-            </a:solidFill>
-          </a:ln>
-          <a:effectLst/>
-        </p:spPr>
-        <p:style>
-          <a:lnRef idx="1">
-            <a:schemeClr val="accent1"/>
-          </a:lnRef>
-          <a:fillRef idx="3">
-            <a:schemeClr val="accent1"/>
-          </a:fillRef>
-          <a:effectRef idx="2">
-            <a:schemeClr val="accent1"/>
-          </a:effectRef>
-          <a:fontRef idx="minor">
-            <a:schemeClr val="lt1"/>
-          </a:fontRef>
-        </p:style>
-        <p:txBody>
-          <a:bodyPr rtlCol="0" anchor="ctr" wrap="square" tIns="36576" bIns="36576"/>
-          <a:lstStyle/>
-          <a:p>
-            <a:pPr algn="ctr"/>
-            <a:r>
-              <a:rPr sz="1100" b="1" i="0">
-                <a:solidFill>
-                  <a:srgbClr val="FFFFFF"/>
-                </a:solidFill>
-                <a:latin typeface="Segoe UI"/>
-              </a:rPr>
-              <a:t>1  </a:t>
-            </a:r>
-            <a:r>
-              <a:rPr sz="1250" b="1" i="0">
-                <a:solidFill>
-                  <a:srgbClr val="FFFFFF"/>
-                </a:solidFill>
-                <a:latin typeface="Consolas"/>
-              </a:rPr>
-              <a:t>orders</a:t>
-            </a:r>
-          </a:p>
-          <a:p>
-            <a:pPr algn="ctr"/>
-            <a:r>
-              <a:rPr sz="1000" b="0" i="0">
-                <a:solidFill>
-                  <a:srgbClr val="FFFFFF"/>
-                </a:solidFill>
-                <a:latin typeface="Segoe UI"/>
-              </a:rPr>
-              <a:t>K: tradeId</a:t>
-            </a:r>
-          </a:p>
-        </p:txBody>
-      </p:sp>
-      <p:sp>
-        <p:nvSpPr>
-          <p:cNvPr id="6" name="Rounded Rectangle 5"/>
-          <p:cNvSpPr/>
-          <p:nvPr/>
-        </p:nvSpPr>
-        <p:spPr>
-          <a:xfrm>
-            <a:off x="685800" y="3483863"/>
-            <a:ext cx="2148840" cy="786384"/>
-          </a:xfrm>
-          <a:prstGeom prst="roundRect">
-            <a:avLst/>
-          </a:prstGeom>
-          <a:solidFill>
-            <a:srgbClr val="233645"/>
-          </a:solidFill>
-          <a:ln w="15875">
-            <a:solidFill>
-              <a:srgbClr val="233645"/>
-            </a:solidFill>
-          </a:ln>
-          <a:effectLst/>
-        </p:spPr>
-        <p:style>
-          <a:lnRef idx="1">
-            <a:schemeClr val="accent1"/>
-          </a:lnRef>
-          <a:fillRef idx="3">
-            <a:schemeClr val="accent1"/>
-          </a:fillRef>
-          <a:effectRef idx="2">
-            <a:schemeClr val="accent1"/>
-          </a:effectRef>
-          <a:fontRef idx="minor">
-            <a:schemeClr val="lt1"/>
-          </a:fontRef>
-        </p:style>
-        <p:txBody>
-          <a:bodyPr rtlCol="0" anchor="ctr" wrap="square" tIns="36576" bIns="36576"/>
-          <a:lstStyle/>
-          <a:p>
-            <a:pPr algn="ctr"/>
-            <a:r>
-              <a:rPr sz="1100" b="1" i="0">
-                <a:solidFill>
-                  <a:srgbClr val="FFFFFF"/>
-                </a:solidFill>
-                <a:latin typeface="Segoe UI"/>
-              </a:rPr>
-              <a:t>2  </a:t>
-            </a:r>
-            <a:r>
-              <a:rPr sz="1250" b="1" i="0">
-                <a:solidFill>
-                  <a:srgbClr val="FFFFFF"/>
-                </a:solidFill>
-                <a:latin typeface="Consolas"/>
-              </a:rPr>
-              <a:t>prices</a:t>
-            </a:r>
-          </a:p>
-          <a:p>
-            <a:pPr algn="ctr"/>
-            <a:r>
-              <a:rPr sz="1000" b="0" i="0">
-                <a:solidFill>
-                  <a:srgbClr val="FFFFFF"/>
-                </a:solidFill>
-                <a:latin typeface="Segoe UI"/>
-              </a:rPr>
-              <a:t>K: symbol</a:t>
-            </a:r>
-          </a:p>
-        </p:txBody>
-      </p:sp>
-      <p:sp>
-        <p:nvSpPr>
-          <p:cNvPr id="7" name="Right Arrow 6"/>
-          <p:cNvSpPr/>
-          <p:nvPr/>
-        </p:nvSpPr>
-        <p:spPr>
-          <a:xfrm>
-            <a:off x="2944368" y="2459736"/>
-            <a:ext cx="457200" cy="114300"/>
-          </a:xfrm>
-          <a:prstGeom prst="rightArrow">
-            <a:avLst/>
-          </a:prstGeom>
-          <a:solidFill>
-            <a:srgbClr val="A9B6C0"/>
-          </a:solidFill>
-          <a:ln>
-            <a:noFill/>
-          </a:ln>
-          <a:effectLst/>
-        </p:spPr>
-        <p:style>
-          <a:lnRef idx="1">
-            <a:schemeClr val="accent1"/>
-          </a:lnRef>
-          <a:fillRef idx="3">
-            <a:schemeClr val="accent1"/>
-          </a:fillRef>
-          <a:effectRef idx="2">
-            <a:schemeClr val="accent1"/>
-          </a:effectRef>
-          <a:fontRef idx="minor">
-            <a:schemeClr val="lt1"/>
-          </a:fontRef>
-        </p:style>
-        <p:txBody>
-          <a:bodyPr rtlCol="0" anchor="ctr"/>
-          <a:lstStyle/>
-          <a:p>
-            <a:pPr algn="ctr"/>
-          </a:p>
-        </p:txBody>
-      </p:sp>
-      <p:sp>
-        <p:nvSpPr>
-          <p:cNvPr id="8" name="Rounded Rectangle 7"/>
-          <p:cNvSpPr/>
-          <p:nvPr/>
-        </p:nvSpPr>
-        <p:spPr>
-          <a:xfrm>
-            <a:off x="3474720" y="1993392"/>
-            <a:ext cx="2286000" cy="1024128"/>
-          </a:xfrm>
-          <a:prstGeom prst="roundRect">
-            <a:avLst/>
-          </a:prstGeom>
-          <a:solidFill>
-            <a:srgbClr val="1B6B8A"/>
-          </a:solidFill>
-          <a:ln w="15875">
-            <a:solidFill>
-              <a:srgbClr val="1B6B8A"/>
-            </a:solidFill>
-          </a:ln>
-          <a:effectLst/>
-        </p:spPr>
-        <p:style>
-          <a:lnRef idx="1">
-            <a:schemeClr val="accent1"/>
-          </a:lnRef>
-          <a:fillRef idx="3">
-            <a:schemeClr val="accent1"/>
-          </a:fillRef>
-          <a:effectRef idx="2">
-            <a:schemeClr val="accent1"/>
-          </a:effectRef>
-          <a:fontRef idx="minor">
-            <a:schemeClr val="lt1"/>
-          </a:fontRef>
-        </p:style>
-        <p:txBody>
-          <a:bodyPr rtlCol="0" anchor="ctr" wrap="square" tIns="36576" bIns="36576"/>
-          <a:lstStyle/>
-          <a:p>
-            <a:pPr algn="ctr"/>
-            <a:r>
-              <a:rPr sz="1250" b="1" i="0">
-                <a:solidFill>
-                  <a:srgbClr val="FFFFFF"/>
-                </a:solidFill>
-                <a:latin typeface="Consolas"/>
-              </a:rPr>
-              <a:t>positions</a:t>
-            </a:r>
-          </a:p>
-          <a:p>
-            <a:pPr algn="ctr"/>
-            <a:r>
-              <a:rPr sz="1000" b="0" i="0">
-                <a:solidFill>
-                  <a:srgbClr val="FFFFFF"/>
-                </a:solidFill>
-                <a:latin typeface="Segoe UI"/>
-              </a:rPr>
-              <a:t>keyBy symbol  /  acct·sub·sym</a:t>
-            </a:r>
-          </a:p>
-        </p:txBody>
-      </p:sp>
-      <p:sp>
-        <p:nvSpPr>
-          <p:cNvPr id="9" name="Right Arrow 8"/>
-          <p:cNvSpPr/>
-          <p:nvPr/>
-        </p:nvSpPr>
-        <p:spPr>
-          <a:xfrm>
-            <a:off x="5870448" y="2459736"/>
-            <a:ext cx="457200" cy="114300"/>
-          </a:xfrm>
-          <a:prstGeom prst="rightArrow">
-            <a:avLst/>
-          </a:prstGeom>
-          <a:solidFill>
-            <a:srgbClr val="A9B6C0"/>
-          </a:solidFill>
-          <a:ln>
-            <a:noFill/>
-          </a:ln>
-          <a:effectLst/>
-        </p:spPr>
-        <p:style>
-          <a:lnRef idx="1">
-            <a:schemeClr val="accent1"/>
-          </a:lnRef>
-          <a:fillRef idx="3">
-            <a:schemeClr val="accent1"/>
-          </a:fillRef>
-          <a:effectRef idx="2">
-            <a:schemeClr val="accent1"/>
-          </a:effectRef>
-          <a:fontRef idx="minor">
-            <a:schemeClr val="lt1"/>
-          </a:fontRef>
-        </p:style>
-        <p:txBody>
-          <a:bodyPr rtlCol="0" anchor="ctr"/>
-          <a:lstStyle/>
-          <a:p>
-            <a:pPr algn="ctr"/>
-          </a:p>
-        </p:txBody>
-      </p:sp>
-      <p:sp>
-        <p:nvSpPr>
-          <p:cNvPr id="10" name="Rounded Rectangle 9"/>
-          <p:cNvSpPr/>
-          <p:nvPr/>
-        </p:nvSpPr>
-        <p:spPr>
-          <a:xfrm>
-            <a:off x="6400800" y="1609344"/>
-            <a:ext cx="2148840" cy="786384"/>
-          </a:xfrm>
-          <a:prstGeom prst="roundRect">
-            <a:avLst/>
-          </a:prstGeom>
-          <a:solidFill>
-            <a:srgbClr val="233645"/>
-          </a:solidFill>
-          <a:ln w="15875">
-            <a:solidFill>
-              <a:srgbClr val="233645"/>
-            </a:solidFill>
-          </a:ln>
-          <a:effectLst/>
-        </p:spPr>
-        <p:style>
-          <a:lnRef idx="1">
-            <a:schemeClr val="accent1"/>
-          </a:lnRef>
-          <a:fillRef idx="3">
-            <a:schemeClr val="accent1"/>
-          </a:fillRef>
-          <a:effectRef idx="2">
-            <a:schemeClr val="accent1"/>
-          </a:effectRef>
-          <a:fontRef idx="minor">
-            <a:schemeClr val="lt1"/>
-          </a:fontRef>
-        </p:style>
-        <p:txBody>
-          <a:bodyPr rtlCol="0" anchor="ctr" wrap="square" tIns="36576" bIns="36576"/>
-          <a:lstStyle/>
-          <a:p>
-            <a:pPr algn="ctr"/>
-            <a:r>
-              <a:rPr sz="1100" b="1" i="0">
-                <a:solidFill>
-                  <a:srgbClr val="FFFFFF"/>
-                </a:solidFill>
-                <a:latin typeface="Segoe UI"/>
-              </a:rPr>
-              <a:t>3  </a:t>
-            </a:r>
-            <a:r>
-              <a:rPr sz="1250" b="1" i="0">
-                <a:solidFill>
-                  <a:srgbClr val="FFFFFF"/>
-                </a:solidFill>
-                <a:latin typeface="Consolas"/>
-              </a:rPr>
-              <a:t>positions-by-symbol</a:t>
-            </a:r>
-          </a:p>
-          <a:p>
-            <a:pPr algn="ctr"/>
-            <a:r>
-              <a:rPr sz="1000" b="0" i="0">
-                <a:solidFill>
-                  <a:srgbClr val="FFFFFF"/>
-                </a:solidFill>
-                <a:latin typeface="Segoe UI"/>
-              </a:rPr>
-              <a:t>4 keys · 10/sec</a:t>
-            </a:r>
-          </a:p>
-        </p:txBody>
-      </p:sp>
-      <p:sp>
-        <p:nvSpPr>
-          <p:cNvPr id="11" name="Rounded Rectangle 10"/>
-          <p:cNvSpPr/>
-          <p:nvPr/>
-        </p:nvSpPr>
-        <p:spPr>
-          <a:xfrm>
-            <a:off x="6400800" y="2569464"/>
-            <a:ext cx="2148840" cy="786384"/>
-          </a:xfrm>
-          <a:prstGeom prst="roundRect">
-            <a:avLst/>
-          </a:prstGeom>
-          <a:solidFill>
-            <a:srgbClr val="233645"/>
-          </a:solidFill>
-          <a:ln w="15875">
-            <a:solidFill>
-              <a:srgbClr val="233645"/>
-            </a:solidFill>
-          </a:ln>
-          <a:effectLst/>
-        </p:spPr>
-        <p:style>
-          <a:lnRef idx="1">
-            <a:schemeClr val="accent1"/>
-          </a:lnRef>
-          <a:fillRef idx="3">
-            <a:schemeClr val="accent1"/>
-          </a:fillRef>
-          <a:effectRef idx="2">
-            <a:schemeClr val="accent1"/>
-          </a:effectRef>
-          <a:fontRef idx="minor">
-            <a:schemeClr val="lt1"/>
-          </a:fontRef>
-        </p:style>
-        <p:txBody>
-          <a:bodyPr rtlCol="0" anchor="ctr" wrap="square" tIns="36576" bIns="36576"/>
-          <a:lstStyle/>
-          <a:p>
-            <a:pPr algn="ctr"/>
-            <a:r>
-              <a:rPr sz="1100" b="1" i="0">
-                <a:solidFill>
-                  <a:srgbClr val="FFFFFF"/>
-                </a:solidFill>
-                <a:latin typeface="Segoe UI"/>
-              </a:rPr>
-              <a:t>4  </a:t>
-            </a:r>
-            <a:r>
-              <a:rPr sz="1250" b="1" i="0">
-                <a:solidFill>
-                  <a:srgbClr val="FFFFFF"/>
-                </a:solidFill>
-                <a:latin typeface="Consolas"/>
-              </a:rPr>
-              <a:t>positions-by-account</a:t>
-            </a:r>
-          </a:p>
-          <a:p>
-            <a:pPr algn="ctr"/>
-            <a:r>
-              <a:rPr sz="1000" b="0" i="0">
-                <a:solidFill>
-                  <a:srgbClr val="FFFFFF"/>
-                </a:solidFill>
-                <a:latin typeface="Segoe UI"/>
-              </a:rPr>
-              <a:t>16 keys · 40/sec</a:t>
-            </a:r>
-          </a:p>
-        </p:txBody>
-      </p:sp>
-      <p:sp>
-        <p:nvSpPr>
-          <p:cNvPr id="12" name="Right Arrow 11"/>
-          <p:cNvSpPr/>
-          <p:nvPr/>
-        </p:nvSpPr>
-        <p:spPr>
-          <a:xfrm>
-            <a:off x="2944368" y="3831336"/>
-            <a:ext cx="457200" cy="114300"/>
-          </a:xfrm>
-          <a:prstGeom prst="rightArrow">
-            <a:avLst/>
-          </a:prstGeom>
-          <a:solidFill>
-            <a:srgbClr val="A9B6C0"/>
-          </a:solidFill>
-          <a:ln>
-            <a:noFill/>
-          </a:ln>
-          <a:effectLst/>
-        </p:spPr>
-        <p:style>
-          <a:lnRef idx="1">
-            <a:schemeClr val="accent1"/>
-          </a:lnRef>
-          <a:fillRef idx="3">
-            <a:schemeClr val="accent1"/>
-          </a:fillRef>
-          <a:effectRef idx="2">
-            <a:schemeClr val="accent1"/>
-          </a:effectRef>
-          <a:fontRef idx="minor">
-            <a:schemeClr val="lt1"/>
-          </a:fontRef>
-        </p:style>
-        <p:txBody>
-          <a:bodyPr rtlCol="0" anchor="ctr"/>
-          <a:lstStyle/>
-          <a:p>
-            <a:pPr algn="ctr"/>
-          </a:p>
-        </p:txBody>
-      </p:sp>
-      <p:sp>
-        <p:nvSpPr>
-          <p:cNvPr id="13" name="Rounded Rectangle 12"/>
-          <p:cNvSpPr/>
-          <p:nvPr/>
-        </p:nvSpPr>
-        <p:spPr>
-          <a:xfrm>
-            <a:off x="3474720" y="3392424"/>
-            <a:ext cx="2286000" cy="1024128"/>
-          </a:xfrm>
-          <a:prstGeom prst="roundRect">
-            <a:avLst/>
-          </a:prstGeom>
-          <a:solidFill>
-            <a:srgbClr val="1B6B8A"/>
-          </a:solidFill>
-          <a:ln w="15875">
-            <a:solidFill>
-              <a:srgbClr val="1B6B8A"/>
-            </a:solidFill>
-          </a:ln>
-          <a:effectLst/>
-        </p:spPr>
-        <p:style>
-          <a:lnRef idx="1">
-            <a:schemeClr val="accent1"/>
-          </a:lnRef>
-          <a:fillRef idx="3">
-            <a:schemeClr val="accent1"/>
-          </a:fillRef>
-          <a:effectRef idx="2">
-            <a:schemeClr val="accent1"/>
-          </a:effectRef>
-          <a:fontRef idx="minor">
-            <a:schemeClr val="lt1"/>
-          </a:fontRef>
-        </p:style>
-        <p:txBody>
-          <a:bodyPr rtlCol="0" anchor="ctr" wrap="square" tIns="36576" bIns="36576"/>
-          <a:lstStyle/>
-          <a:p>
-            <a:pPr algn="ctr"/>
-            <a:r>
-              <a:rPr sz="1250" b="1" i="0">
-                <a:solidFill>
-                  <a:srgbClr val="FFFFFF"/>
-                </a:solidFill>
-                <a:latin typeface="Consolas"/>
-              </a:rPr>
-              <a:t>market value</a:t>
-            </a:r>
-          </a:p>
-          <a:p>
-            <a:pPr algn="ctr"/>
-            <a:r>
-              <a:rPr sz="1000" b="0" i="0">
-                <a:solidFill>
-                  <a:srgbClr val="FFFFFF"/>
-                </a:solidFill>
-                <a:latin typeface="Segoe UI"/>
-              </a:rPr>
-              <a:t>price × position, 10s window</a:t>
-            </a:r>
-          </a:p>
-        </p:txBody>
-      </p:sp>
-      <p:sp>
-        <p:nvSpPr>
-          <p:cNvPr id="14" name="Right Arrow 13"/>
-          <p:cNvSpPr/>
-          <p:nvPr/>
-        </p:nvSpPr>
-        <p:spPr>
-          <a:xfrm>
-            <a:off x="5870448" y="3831336"/>
-            <a:ext cx="457200" cy="114300"/>
-          </a:xfrm>
-          <a:prstGeom prst="rightArrow">
-            <a:avLst/>
-          </a:prstGeom>
-          <a:solidFill>
-            <a:srgbClr val="A9B6C0"/>
-          </a:solidFill>
-          <a:ln>
-            <a:noFill/>
-          </a:ln>
-          <a:effectLst/>
-        </p:spPr>
-        <p:style>
-          <a:lnRef idx="1">
-            <a:schemeClr val="accent1"/>
-          </a:lnRef>
-          <a:fillRef idx="3">
-            <a:schemeClr val="accent1"/>
-          </a:fillRef>
-          <a:effectRef idx="2">
-            <a:schemeClr val="accent1"/>
-          </a:effectRef>
-          <a:fontRef idx="minor">
-            <a:schemeClr val="lt1"/>
-          </a:fontRef>
-        </p:style>
-        <p:txBody>
-          <a:bodyPr rtlCol="0" anchor="ctr"/>
-          <a:lstStyle/>
-          <a:p>
-            <a:pPr algn="ctr"/>
-          </a:p>
-        </p:txBody>
-      </p:sp>
-      <p:sp>
-        <p:nvSpPr>
-          <p:cNvPr id="15" name="Rounded Rectangle 14"/>
-          <p:cNvSpPr/>
-          <p:nvPr/>
-        </p:nvSpPr>
-        <p:spPr>
-          <a:xfrm>
-            <a:off x="6400800" y="3529584"/>
-            <a:ext cx="2148840" cy="786384"/>
-          </a:xfrm>
-          <a:prstGeom prst="roundRect">
-            <a:avLst/>
-          </a:prstGeom>
-          <a:solidFill>
-            <a:srgbClr val="233645"/>
-          </a:solidFill>
-          <a:ln w="15875">
-            <a:solidFill>
-              <a:srgbClr val="233645"/>
-            </a:solidFill>
-          </a:ln>
-          <a:effectLst/>
-        </p:spPr>
-        <p:style>
-          <a:lnRef idx="1">
-            <a:schemeClr val="accent1"/>
-          </a:lnRef>
-          <a:fillRef idx="3">
-            <a:schemeClr val="accent1"/>
-          </a:fillRef>
-          <a:effectRef idx="2">
-            <a:schemeClr val="accent1"/>
-          </a:effectRef>
-          <a:fontRef idx="minor">
-            <a:schemeClr val="lt1"/>
-          </a:fontRef>
-        </p:style>
-        <p:txBody>
-          <a:bodyPr rtlCol="0" anchor="ctr" wrap="square" tIns="36576" bIns="36576"/>
-          <a:lstStyle/>
-          <a:p>
-            <a:pPr algn="ctr"/>
-            <a:r>
-              <a:rPr sz="1100" b="1" i="0">
-                <a:solidFill>
-                  <a:srgbClr val="FFFFFF"/>
-                </a:solidFill>
-                <a:latin typeface="Segoe UI"/>
-              </a:rPr>
-              <a:t>5  </a:t>
-            </a:r>
-            <a:r>
-              <a:rPr sz="1250" b="1" i="0">
-                <a:solidFill>
-                  <a:srgbClr val="FFFFFF"/>
-                </a:solidFill>
-                <a:latin typeface="Consolas"/>
-              </a:rPr>
-              <a:t>mv-by-symbol</a:t>
-            </a:r>
-          </a:p>
-          <a:p>
-            <a:pPr algn="ctr"/>
-            <a:r>
-              <a:rPr sz="1000" b="0" i="0">
-                <a:solidFill>
-                  <a:srgbClr val="FFFFFF"/>
-                </a:solidFill>
-                <a:latin typeface="Segoe UI"/>
-              </a:rPr>
-              <a:t>4 keys · 4 per window</a:t>
-            </a:r>
-          </a:p>
-        </p:txBody>
-      </p:sp>
-      <p:sp>
-        <p:nvSpPr>
-          <p:cNvPr id="16" name="Rounded Rectangle 15"/>
-          <p:cNvSpPr/>
-          <p:nvPr/>
-        </p:nvSpPr>
-        <p:spPr>
-          <a:xfrm>
-            <a:off x="6400800" y="4489704"/>
-            <a:ext cx="2148840" cy="786384"/>
-          </a:xfrm>
-          <a:prstGeom prst="roundRect">
-            <a:avLst/>
-          </a:prstGeom>
-          <a:solidFill>
-            <a:srgbClr val="233645"/>
-          </a:solidFill>
-          <a:ln w="15875">
-            <a:solidFill>
-              <a:srgbClr val="233645"/>
-            </a:solidFill>
-          </a:ln>
-          <a:effectLst/>
-        </p:spPr>
-        <p:style>
-          <a:lnRef idx="1">
-            <a:schemeClr val="accent1"/>
-          </a:lnRef>
-          <a:fillRef idx="3">
-            <a:schemeClr val="accent1"/>
-          </a:fillRef>
-          <a:effectRef idx="2">
-            <a:schemeClr val="accent1"/>
-          </a:effectRef>
-          <a:fontRef idx="minor">
-            <a:schemeClr val="lt1"/>
-          </a:fontRef>
-        </p:style>
-        <p:txBody>
-          <a:bodyPr rtlCol="0" anchor="ctr" wrap="square" tIns="36576" bIns="36576"/>
-          <a:lstStyle/>
-          <a:p>
-            <a:pPr algn="ctr"/>
-            <a:r>
-              <a:rPr sz="1100" b="1" i="0">
-                <a:solidFill>
-                  <a:srgbClr val="FFFFFF"/>
-                </a:solidFill>
-                <a:latin typeface="Segoe UI"/>
-              </a:rPr>
-              <a:t>6  </a:t>
-            </a:r>
-            <a:r>
-              <a:rPr sz="1250" b="1" i="0">
-                <a:solidFill>
-                  <a:srgbClr val="FFFFFF"/>
-                </a:solidFill>
-                <a:latin typeface="Consolas"/>
-              </a:rPr>
-              <a:t>mv-by-account</a:t>
-            </a:r>
-          </a:p>
-          <a:p>
-            <a:pPr algn="ctr"/>
-            <a:r>
-              <a:rPr sz="1000" b="0" i="0">
-                <a:solidFill>
-                  <a:srgbClr val="FFFFFF"/>
-                </a:solidFill>
-                <a:latin typeface="Segoe UI"/>
-              </a:rPr>
-              <a:t>16 keys · 16 per window</a:t>
-            </a:r>
-          </a:p>
-        </p:txBody>
-      </p:sp>
-      <p:sp>
-        <p:nvSpPr>
-          <p:cNvPr id="17" name="TextBox 16"/>
-          <p:cNvSpPr txBox="1"/>
-          <p:nvPr/>
-        </p:nvSpPr>
-        <p:spPr>
-          <a:xfrm>
-            <a:off x="8915400" y="1929384"/>
-            <a:ext cx="2834640" cy="2926080"/>
+            <a:off x="521207" y="2002536"/>
+            <a:ext cx="11155680" cy="4172586"/>
           </a:xfrm>
           <a:prstGeom prst="rect">
             <a:avLst/>
           </a:prstGeom>
-          <a:noFill/>
         </p:spPr>
-        <p:txBody>
-          <a:bodyPr wrap="square">
-            <a:spAutoFit/>
-          </a:bodyPr>
-          <a:lstStyle/>
-          <a:p>
-            <a:pPr algn="l">
-              <a:spcAft>
-                <a:spcPts val="1200"/>
-              </a:spcAft>
-            </a:pPr>
-            <a:r>
-              <a:rPr sz="1200" b="1" i="0">
-                <a:solidFill>
-                  <a:srgbClr val="14222E"/>
-                </a:solidFill>
-                <a:latin typeface="Segoe UI"/>
-              </a:rPr>
-              <a:t>One order, five records.  </a:t>
-            </a:r>
-            <a:r>
-              <a:rPr sz="1200" b="0" i="0">
-                <a:solidFill>
-                  <a:srgbClr val="2E3D4A"/>
-                </a:solidFill>
-                <a:latin typeface="Segoe UI"/>
-              </a:rPr>
-              <a:t>Four account-side allocations plus one symbol-side position.</a:t>
-            </a:r>
-          </a:p>
-          <a:p>
-            <a:pPr>
-              <a:spcAft>
-                <a:spcPts val="1200"/>
-              </a:spcAft>
-            </a:pPr>
-            <a:r>
-              <a:rPr sz="1200" b="1" i="0">
-                <a:solidFill>
-                  <a:srgbClr val="14222E"/>
-                </a:solidFill>
-                <a:latin typeface="Segoe UI"/>
-              </a:rPr>
-              <a:t>Two aggregations, in parallel.  </a:t>
-            </a:r>
-            <a:r>
-              <a:rPr sz="1200" b="0" i="0">
-                <a:solidFill>
-                  <a:srgbClr val="2E3D4A"/>
-                </a:solidFill>
-                <a:latin typeface="Segoe UI"/>
-              </a:rPr>
-              <a:t>One key per symbol; one per account and symbol.</a:t>
-            </a:r>
-          </a:p>
-          <a:p>
-            <a:pPr>
-              <a:spcAft>
-                <a:spcPts val="1200"/>
-              </a:spcAft>
-            </a:pPr>
-            <a:r>
-              <a:rPr sz="1200" b="1" i="0">
-                <a:solidFill>
-                  <a:srgbClr val="14222E"/>
-                </a:solidFill>
-                <a:latin typeface="Segoe UI"/>
-              </a:rPr>
-              <a:t>Prices are broadcast.  </a:t>
-            </a:r>
-            <a:r>
-              <a:rPr sz="1200" b="0" i="0">
-                <a:solidFill>
-                  <a:srgbClr val="2E3D4A"/>
-                </a:solidFill>
-                <a:latin typeface="Segoe UI"/>
-              </a:rPr>
-              <a:t>Every task sees every price.</a:t>
-            </a:r>
-          </a:p>
-        </p:txBody>
-      </p:sp>
-      <p:sp>
-        <p:nvSpPr>
-          <p:cNvPr id="18" name="TextBox 17"/>
+      </p:pic>
+      <p:sp>
+        <p:nvSpPr>
+          <p:cNvPr id="6" name="TextBox 5"/>
           <p:cNvSpPr txBox="1"/>
           <p:nvPr/>
         </p:nvSpPr>
         <p:spPr>
           <a:xfrm>
-            <a:off x="685800" y="5806440"/>
+            <a:off x="685800" y="6303138"/>
             <a:ext cx="10881360" cy="822960"/>
           </a:xfrm>
           <a:prstGeom prst="rect">
@@ -8336,7 +7496,7 @@
                 </a:solidFill>
                 <a:latin typeface="Segoe UI"/>
               </a:rPr>
-              <a:t>Every edge is labelled with its key and value; the full walkthrough and object model are in docs/design/pipeline-design.md.</a:t>
+              <a:t>Every edge carries its partition key and value. The diagram states the specified one-minute window; the demo overrides it to ten seconds, and the calculation is identical either way.</a:t>
             </a:r>
           </a:p>
         </p:txBody>

--- a/docs/steps/step-13/final-demo.pptx
+++ b/docs/steps/step-13/final-demo.pptx
@@ -9429,7 +9429,7 @@
                           </a:solidFill>
                           <a:latin typeface="Segoe UI"/>
                         </a:rPr>
-                        <a:t>p99</a:t>
+                        <a:t>max</a:t>
                       </a:r>
                     </a:p>
                   </a:txBody>
@@ -9500,7 +9500,7 @@
                           </a:solidFill>
                           <a:latin typeface="Consolas"/>
                         </a:rPr>
-                        <a:t>110 ms</a:t>
+                        <a:t>110 ms  (p99)</a:t>
                       </a:r>
                     </a:p>
                   </a:txBody>
@@ -9571,7 +9571,7 @@
                           </a:solidFill>
                           <a:latin typeface="Consolas"/>
                         </a:rPr>
-                        <a:t>1 020 ms</a:t>
+                        <a:t>1 025 ms</a:t>
                       </a:r>
                     </a:p>
                   </a:txBody>
@@ -9788,7 +9788,7 @@
                           </a:solidFill>
                           <a:latin typeface="Consolas"/>
                         </a:rPr>
-                        <a:t>497 ms</a:t>
+                        <a:t>518 ms</a:t>
                       </a:r>
                     </a:p>
                   </a:txBody>
@@ -9811,7 +9811,7 @@
                           </a:solidFill>
                           <a:latin typeface="Consolas"/>
                         </a:rPr>
-                        <a:t>1 041 ms</a:t>
+                        <a:t>1 025 ms</a:t>
                       </a:r>
                     </a:p>
                   </a:txBody>
